--- a/hs-web/T07_비동기_처리와_HTTP_통신.pptx
+++ b/hs-web/T07_비동기_처리와_HTTP_통신.pptx
@@ -16592,908 +16592,30 @@
           </a:p>
         </p:txBody>
       </p:sp>
-      <p:sp>
-        <p:nvSpPr>
-          <p:cNvPr id="11" name="deckgen:code"/>
-          <p:cNvSpPr txBox="1"/>
-          <p:nvPr/>
-        </p:nvSpPr>
+      <p:pic>
+        <p:nvPicPr>
+          <p:cNvPr id="11" name="deckgen:code-art" descr="image.png"/>
+          <p:cNvPicPr>
+            <a:picLocks noChangeAspect="1"/>
+          </p:cNvPicPr>
+          <p:nvPr/>
+        </p:nvPicPr>
+        <p:blipFill>
+          <a:blip r:embed="rId2"/>
+          <a:stretch>
+            <a:fillRect/>
+          </a:stretch>
+        </p:blipFill>
         <p:spPr>
           <a:xfrm>
             <a:off x="2038350" y="2552700"/>
-            <a:ext cx="14897100" cy="5105400"/>
-          </a:xfrm>
-          <a:prstGeom prst="rect">
-            <a:avLst/>
-          </a:prstGeom>
-          <a:noFill/>
-        </p:spPr>
-        <p:txBody>
-          <a:bodyPr wrap="none" lIns="0" rIns="0" tIns="0" bIns="0" anchor="t">
-            <a:spAutoFit/>
-          </a:bodyPr>
-          <a:lstStyle/>
-          <a:p>
-            <a:pPr algn="l">
-              <a:lnSpc>
-                <a:spcPct val="115000"/>
-              </a:lnSpc>
-            </a:pPr>
-            <a:r>
-              <a:rPr sz="2025" b="0">
-                <a:solidFill>
-                  <a:srgbClr val="E6EAF2"/>
-                </a:solidFill>
-                <a:latin typeface="나눔고딕코딩"/>
-                <a:ea typeface="나눔고딕코딩"/>
-                <a:cs typeface="나눔고딕코딩"/>
-              </a:rPr>
-              <a:t>── 요청 ──────────────────────────────</a:t>
-            </a:r>
-          </a:p>
-          <a:p>
-            <a:pPr algn="l">
-              <a:lnSpc>
-                <a:spcPct val="115000"/>
-              </a:lnSpc>
-            </a:pPr>
-            <a:r>
-              <a:rPr sz="2025" b="0">
-                <a:solidFill>
-                  <a:srgbClr val="E6EAF2"/>
-                </a:solidFill>
-                <a:latin typeface="나눔고딕코딩"/>
-                <a:ea typeface="나눔고딕코딩"/>
-                <a:cs typeface="나눔고딕코딩"/>
-              </a:rPr>
-              <a:t>GET</a:t>
-            </a:r>
-            <a:r>
-              <a:rPr sz="2025" b="0">
-                <a:solidFill>
-                  <a:srgbClr val="E6EAF2"/>
-                </a:solidFill>
-                <a:latin typeface="나눔고딕코딩"/>
-                <a:ea typeface="나눔고딕코딩"/>
-                <a:cs typeface="나눔고딕코딩"/>
-              </a:rPr>
-              <a:t> /</a:t>
-            </a:r>
-            <a:r>
-              <a:rPr sz="2025" b="0">
-                <a:solidFill>
-                  <a:srgbClr val="E6EAF2"/>
-                </a:solidFill>
-                <a:latin typeface="나눔고딕코딩"/>
-                <a:ea typeface="나눔고딕코딩"/>
-                <a:cs typeface="나눔고딕코딩"/>
-              </a:rPr>
-              <a:t>api</a:t>
-            </a:r>
-            <a:r>
-              <a:rPr sz="2025" b="0">
-                <a:solidFill>
-                  <a:srgbClr val="E6EAF2"/>
-                </a:solidFill>
-                <a:latin typeface="나눔고딕코딩"/>
-                <a:ea typeface="나눔고딕코딩"/>
-                <a:cs typeface="나눔고딕코딩"/>
-              </a:rPr>
-              <a:t>/</a:t>
-            </a:r>
-            <a:r>
-              <a:rPr sz="2025" b="0">
-                <a:solidFill>
-                  <a:srgbClr val="E6EAF2"/>
-                </a:solidFill>
-                <a:latin typeface="나눔고딕코딩"/>
-                <a:ea typeface="나눔고딕코딩"/>
-                <a:cs typeface="나눔고딕코딩"/>
-              </a:rPr>
-              <a:t>students</a:t>
-            </a:r>
-            <a:r>
-              <a:rPr sz="2025" b="0">
-                <a:solidFill>
-                  <a:srgbClr val="E6EAF2"/>
-                </a:solidFill>
-                <a:latin typeface="나눔고딕코딩"/>
-                <a:ea typeface="나눔고딕코딩"/>
-                <a:cs typeface="나눔고딕코딩"/>
-              </a:rPr>
-              <a:t>/</a:t>
-            </a:r>
-            <a:r>
-              <a:rPr sz="2025" b="0">
-                <a:solidFill>
-                  <a:srgbClr val="FFB08A"/>
-                </a:solidFill>
-                <a:latin typeface="나눔고딕코딩"/>
-                <a:ea typeface="나눔고딕코딩"/>
-                <a:cs typeface="나눔고딕코딩"/>
-              </a:rPr>
-              <a:t>3</a:t>
-            </a:r>
-            <a:r>
-              <a:rPr sz="2025" b="0">
-                <a:solidFill>
-                  <a:srgbClr val="E6EAF2"/>
-                </a:solidFill>
-                <a:latin typeface="나눔고딕코딩"/>
-                <a:ea typeface="나눔고딕코딩"/>
-                <a:cs typeface="나눔고딕코딩"/>
-              </a:rPr>
-              <a:t> </a:t>
-            </a:r>
-            <a:r>
-              <a:rPr sz="2025" b="0">
-                <a:solidFill>
-                  <a:srgbClr val="E6EAF2"/>
-                </a:solidFill>
-                <a:latin typeface="나눔고딕코딩"/>
-                <a:ea typeface="나눔고딕코딩"/>
-                <a:cs typeface="나눔고딕코딩"/>
-              </a:rPr>
-              <a:t>HTTP</a:t>
-            </a:r>
-            <a:r>
-              <a:rPr sz="2025" b="0">
-                <a:solidFill>
-                  <a:srgbClr val="E6EAF2"/>
-                </a:solidFill>
-                <a:latin typeface="나눔고딕코딩"/>
-                <a:ea typeface="나눔고딕코딩"/>
-                <a:cs typeface="나눔고딕코딩"/>
-              </a:rPr>
-              <a:t>/</a:t>
-            </a:r>
-            <a:r>
-              <a:rPr sz="2025" b="0">
-                <a:solidFill>
-                  <a:srgbClr val="FFB08A"/>
-                </a:solidFill>
-                <a:latin typeface="나눔고딕코딩"/>
-                <a:ea typeface="나눔고딕코딩"/>
-                <a:cs typeface="나눔고딕코딩"/>
-              </a:rPr>
-              <a:t>1.1</a:t>
-            </a:r>
-            <a:r>
-              <a:rPr sz="2025" b="0">
-                <a:solidFill>
-                  <a:srgbClr val="E6EAF2"/>
-                </a:solidFill>
-                <a:latin typeface="나눔고딕코딩"/>
-                <a:ea typeface="나눔고딕코딩"/>
-                <a:cs typeface="나눔고딕코딩"/>
-              </a:rPr>
-              <a:t>        시작줄: 메서드 · 경로 · 버전</a:t>
-            </a:r>
-          </a:p>
-          <a:p>
-            <a:pPr algn="l">
-              <a:lnSpc>
-                <a:spcPct val="115000"/>
-              </a:lnSpc>
-            </a:pPr>
-            <a:r>
-              <a:rPr sz="2025" b="0">
-                <a:solidFill>
-                  <a:srgbClr val="E6EAF2"/>
-                </a:solidFill>
-                <a:latin typeface="나눔고딕코딩"/>
-                <a:ea typeface="나눔고딕코딩"/>
-                <a:cs typeface="나눔고딕코딩"/>
-              </a:rPr>
-              <a:t>Host</a:t>
-            </a:r>
-            <a:r>
-              <a:rPr sz="2025" b="0">
-                <a:solidFill>
-                  <a:srgbClr val="E6EAF2"/>
-                </a:solidFill>
-                <a:latin typeface="나눔고딕코딩"/>
-                <a:ea typeface="나눔고딕코딩"/>
-                <a:cs typeface="나눔고딕코딩"/>
-              </a:rPr>
-              <a:t>: </a:t>
-            </a:r>
-            <a:r>
-              <a:rPr sz="2025" b="0">
-                <a:solidFill>
-                  <a:srgbClr val="E6EAF2"/>
-                </a:solidFill>
-                <a:latin typeface="나눔고딕코딩"/>
-                <a:ea typeface="나눔고딕코딩"/>
-                <a:cs typeface="나눔고딕코딩"/>
-              </a:rPr>
-              <a:t>example</a:t>
-            </a:r>
-            <a:r>
-              <a:rPr sz="2025" b="0">
-                <a:solidFill>
-                  <a:srgbClr val="E6EAF2"/>
-                </a:solidFill>
-                <a:latin typeface="나눔고딕코딩"/>
-                <a:ea typeface="나눔고딕코딩"/>
-                <a:cs typeface="나눔고딕코딩"/>
-              </a:rPr>
-              <a:t>.</a:t>
-            </a:r>
-            <a:r>
-              <a:rPr sz="2025" b="0">
-                <a:solidFill>
-                  <a:srgbClr val="E6EAF2"/>
-                </a:solidFill>
-                <a:latin typeface="나눔고딕코딩"/>
-                <a:ea typeface="나눔고딕코딩"/>
-                <a:cs typeface="나눔고딕코딩"/>
-              </a:rPr>
-              <a:t>com</a:t>
-            </a:r>
-            <a:r>
-              <a:rPr sz="2025" b="0">
-                <a:solidFill>
-                  <a:srgbClr val="E6EAF2"/>
-                </a:solidFill>
-                <a:latin typeface="나눔고딕코딩"/>
-                <a:ea typeface="나눔고딕코딩"/>
-                <a:cs typeface="나눔고딕코딩"/>
-              </a:rPr>
-              <a:t>                    헤더</a:t>
-            </a:r>
-          </a:p>
-          <a:p>
-            <a:pPr algn="l">
-              <a:lnSpc>
-                <a:spcPct val="115000"/>
-              </a:lnSpc>
-            </a:pPr>
-            <a:r>
-              <a:rPr sz="2025" b="0">
-                <a:solidFill>
-                  <a:srgbClr val="E6EAF2"/>
-                </a:solidFill>
-                <a:latin typeface="나눔고딕코딩"/>
-                <a:ea typeface="나눔고딕코딩"/>
-                <a:cs typeface="나눔고딕코딩"/>
-              </a:rPr>
-              <a:t>Accept</a:t>
-            </a:r>
-            <a:r>
-              <a:rPr sz="2025" b="0">
-                <a:solidFill>
-                  <a:srgbClr val="E6EAF2"/>
-                </a:solidFill>
-                <a:latin typeface="나눔고딕코딩"/>
-                <a:ea typeface="나눔고딕코딩"/>
-                <a:cs typeface="나눔고딕코딩"/>
-              </a:rPr>
-              <a:t>: </a:t>
-            </a:r>
-            <a:r>
-              <a:rPr sz="2025" b="0">
-                <a:solidFill>
-                  <a:srgbClr val="E6EAF2"/>
-                </a:solidFill>
-                <a:latin typeface="나눔고딕코딩"/>
-                <a:ea typeface="나눔고딕코딩"/>
-                <a:cs typeface="나눔고딕코딩"/>
-              </a:rPr>
-              <a:t>application</a:t>
-            </a:r>
-            <a:r>
-              <a:rPr sz="2025" b="0">
-                <a:solidFill>
-                  <a:srgbClr val="E6EAF2"/>
-                </a:solidFill>
-                <a:latin typeface="나눔고딕코딩"/>
-                <a:ea typeface="나눔고딕코딩"/>
-                <a:cs typeface="나눔고딕코딩"/>
-              </a:rPr>
-              <a:t>/</a:t>
-            </a:r>
-            <a:r>
-              <a:rPr sz="2025" b="0">
-                <a:solidFill>
-                  <a:srgbClr val="E6EAF2"/>
-                </a:solidFill>
-                <a:latin typeface="나눔고딕코딩"/>
-                <a:ea typeface="나눔고딕코딩"/>
-                <a:cs typeface="나눔고딕코딩"/>
-              </a:rPr>
-              <a:t>json</a:t>
-            </a:r>
-          </a:p>
-          <a:p>
-            <a:pPr algn="l">
-              <a:lnSpc>
-                <a:spcPct val="115000"/>
-              </a:lnSpc>
-            </a:pPr>
-            <a:r>
-              <a:rPr sz="2025" b="0">
-                <a:solidFill>
-                  <a:srgbClr val="E6EAF2"/>
-                </a:solidFill>
-                <a:latin typeface="나눔고딕코딩"/>
-                <a:ea typeface="나눔고딕코딩"/>
-                <a:cs typeface="나눔고딕코딩"/>
-              </a:rPr>
-              <a:t>Authorization</a:t>
-            </a:r>
-            <a:r>
-              <a:rPr sz="2025" b="0">
-                <a:solidFill>
-                  <a:srgbClr val="E6EAF2"/>
-                </a:solidFill>
-                <a:latin typeface="나눔고딕코딩"/>
-                <a:ea typeface="나눔고딕코딩"/>
-                <a:cs typeface="나눔고딕코딩"/>
-              </a:rPr>
-              <a:t>: </a:t>
-            </a:r>
-            <a:r>
-              <a:rPr sz="2025" b="0">
-                <a:solidFill>
-                  <a:srgbClr val="E6EAF2"/>
-                </a:solidFill>
-                <a:latin typeface="나눔고딕코딩"/>
-                <a:ea typeface="나눔고딕코딩"/>
-                <a:cs typeface="나눔고딕코딩"/>
-              </a:rPr>
-              <a:t>Bearer</a:t>
-            </a:r>
-            <a:r>
-              <a:rPr sz="2025" b="0">
-                <a:solidFill>
-                  <a:srgbClr val="E6EAF2"/>
-                </a:solidFill>
-                <a:latin typeface="나눔고딕코딩"/>
-                <a:ea typeface="나눔고딕코딩"/>
-                <a:cs typeface="나눔고딕코딩"/>
-              </a:rPr>
-              <a:t> </a:t>
-            </a:r>
-            <a:r>
-              <a:rPr sz="2025" b="0">
-                <a:solidFill>
-                  <a:srgbClr val="E6EAF2"/>
-                </a:solidFill>
-                <a:latin typeface="나눔고딕코딩"/>
-                <a:ea typeface="나눔고딕코딩"/>
-                <a:cs typeface="나눔고딕코딩"/>
-              </a:rPr>
-              <a:t>eyJhbGc</a:t>
-            </a:r>
-            <a:r>
-              <a:rPr sz="2025" b="0">
-                <a:solidFill>
-                  <a:srgbClr val="E6EAF2"/>
-                </a:solidFill>
-                <a:latin typeface="나눔고딕코딩"/>
-                <a:ea typeface="나눔고딕코딩"/>
-                <a:cs typeface="나눔고딕코딩"/>
-              </a:rPr>
-              <a:t>...</a:t>
-            </a:r>
-          </a:p>
-          <a:p>
-            <a:pPr algn="l">
-              <a:lnSpc>
-                <a:spcPct val="115000"/>
-              </a:lnSpc>
-            </a:pPr>
-            <a:r>
-              <a:rPr sz="2025" b="0">
-                <a:solidFill>
-                  <a:srgbClr val="E6EAF2"/>
-                </a:solidFill>
-                <a:latin typeface="나눔고딕코딩"/>
-                <a:ea typeface="나눔고딕코딩"/>
-                <a:cs typeface="나눔고딕코딩"/>
-              </a:rPr>
-              <a:t>                                     빈 줄</a:t>
-            </a:r>
-          </a:p>
-          <a:p>
-            <a:pPr algn="l">
-              <a:lnSpc>
-                <a:spcPct val="115000"/>
-              </a:lnSpc>
-            </a:pPr>
-            <a:r>
-              <a:rPr sz="2025" b="0">
-                <a:solidFill>
-                  <a:srgbClr val="E6EAF2"/>
-                </a:solidFill>
-                <a:latin typeface="나눔고딕코딩"/>
-                <a:ea typeface="나눔고딕코딩"/>
-                <a:cs typeface="나눔고딕코딩"/>
-              </a:rPr>
-              <a:t>(본문 — </a:t>
-            </a:r>
-            <a:r>
-              <a:rPr sz="2025" b="0">
-                <a:solidFill>
-                  <a:srgbClr val="E6EAF2"/>
-                </a:solidFill>
-                <a:latin typeface="나눔고딕코딩"/>
-                <a:ea typeface="나눔고딕코딩"/>
-                <a:cs typeface="나눔고딕코딩"/>
-              </a:rPr>
-              <a:t>GET에는</a:t>
-            </a:r>
-            <a:r>
-              <a:rPr sz="2025" b="0">
-                <a:solidFill>
-                  <a:srgbClr val="E6EAF2"/>
-                </a:solidFill>
-                <a:latin typeface="나눔고딕코딩"/>
-                <a:ea typeface="나눔고딕코딩"/>
-                <a:cs typeface="나눔고딕코딩"/>
-              </a:rPr>
-              <a:t> 보통 없음)</a:t>
-            </a:r>
-          </a:p>
-          <a:p>
-            <a:pPr algn="l">
-              <a:lnSpc>
-                <a:spcPct val="115000"/>
-              </a:lnSpc>
-            </a:pPr>
-            <a:r>
-              <a:rPr sz="2025" b="0">
-                <a:solidFill>
-                  <a:srgbClr val="E6EAF2"/>
-                </a:solidFill>
-                <a:latin typeface="나눔고딕코딩"/>
-                <a:ea typeface="나눔고딕코딩"/>
-                <a:cs typeface="나눔고딕코딩"/>
-              </a:rPr>
-              <a:t/>
-            </a:r>
-          </a:p>
-          <a:p>
-            <a:pPr algn="l">
-              <a:lnSpc>
-                <a:spcPct val="115000"/>
-              </a:lnSpc>
-            </a:pPr>
-            <a:r>
-              <a:rPr sz="2025" b="0">
-                <a:solidFill>
-                  <a:srgbClr val="E6EAF2"/>
-                </a:solidFill>
-                <a:latin typeface="나눔고딕코딩"/>
-                <a:ea typeface="나눔고딕코딩"/>
-                <a:cs typeface="나눔고딕코딩"/>
-              </a:rPr>
-              <a:t>── 응답 ──────────────────────────────</a:t>
-            </a:r>
-          </a:p>
-          <a:p>
-            <a:pPr algn="l">
-              <a:lnSpc>
-                <a:spcPct val="115000"/>
-              </a:lnSpc>
-            </a:pPr>
-            <a:r>
-              <a:rPr sz="2025" b="0">
-                <a:solidFill>
-                  <a:srgbClr val="E6EAF2"/>
-                </a:solidFill>
-                <a:latin typeface="나눔고딕코딩"/>
-                <a:ea typeface="나눔고딕코딩"/>
-                <a:cs typeface="나눔고딕코딩"/>
-              </a:rPr>
-              <a:t>HTTP</a:t>
-            </a:r>
-            <a:r>
-              <a:rPr sz="2025" b="0">
-                <a:solidFill>
-                  <a:srgbClr val="E6EAF2"/>
-                </a:solidFill>
-                <a:latin typeface="나눔고딕코딩"/>
-                <a:ea typeface="나눔고딕코딩"/>
-                <a:cs typeface="나눔고딕코딩"/>
-              </a:rPr>
-              <a:t>/</a:t>
-            </a:r>
-            <a:r>
-              <a:rPr sz="2025" b="0">
-                <a:solidFill>
-                  <a:srgbClr val="FFB08A"/>
-                </a:solidFill>
-                <a:latin typeface="나눔고딕코딩"/>
-                <a:ea typeface="나눔고딕코딩"/>
-                <a:cs typeface="나눔고딕코딩"/>
-              </a:rPr>
-              <a:t>1.1</a:t>
-            </a:r>
-            <a:r>
-              <a:rPr sz="2025" b="0">
-                <a:solidFill>
-                  <a:srgbClr val="E6EAF2"/>
-                </a:solidFill>
-                <a:latin typeface="나눔고딕코딩"/>
-                <a:ea typeface="나눔고딕코딩"/>
-                <a:cs typeface="나눔고딕코딩"/>
-              </a:rPr>
-              <a:t> </a:t>
-            </a:r>
-            <a:r>
-              <a:rPr sz="2025" b="0">
-                <a:solidFill>
-                  <a:srgbClr val="FFB08A"/>
-                </a:solidFill>
-                <a:latin typeface="나눔고딕코딩"/>
-                <a:ea typeface="나눔고딕코딩"/>
-                <a:cs typeface="나눔고딕코딩"/>
-              </a:rPr>
-              <a:t>200</a:t>
-            </a:r>
-            <a:r>
-              <a:rPr sz="2025" b="0">
-                <a:solidFill>
-                  <a:srgbClr val="E6EAF2"/>
-                </a:solidFill>
-                <a:latin typeface="나눔고딕코딩"/>
-                <a:ea typeface="나눔고딕코딩"/>
-                <a:cs typeface="나눔고딕코딩"/>
-              </a:rPr>
-              <a:t> </a:t>
-            </a:r>
-            <a:r>
-              <a:rPr sz="2025" b="0">
-                <a:solidFill>
-                  <a:srgbClr val="E6EAF2"/>
-                </a:solidFill>
-                <a:latin typeface="나눔고딕코딩"/>
-                <a:ea typeface="나눔고딕코딩"/>
-                <a:cs typeface="나눔고딕코딩"/>
-              </a:rPr>
-              <a:t>OK</a:t>
-            </a:r>
-            <a:r>
-              <a:rPr sz="2025" b="0">
-                <a:solidFill>
-                  <a:srgbClr val="E6EAF2"/>
-                </a:solidFill>
-                <a:latin typeface="나눔고딕코딩"/>
-                <a:ea typeface="나눔고딕코딩"/>
-                <a:cs typeface="나눔고딕코딩"/>
-              </a:rPr>
-              <a:t>                      상태줄: 버전 · 코드 · 설명</a:t>
-            </a:r>
-          </a:p>
-          <a:p>
-            <a:pPr algn="l">
-              <a:lnSpc>
-                <a:spcPct val="115000"/>
-              </a:lnSpc>
-            </a:pPr>
-            <a:r>
-              <a:rPr sz="2025" b="0">
-                <a:solidFill>
-                  <a:srgbClr val="E6EAF2"/>
-                </a:solidFill>
-                <a:latin typeface="나눔고딕코딩"/>
-                <a:ea typeface="나눔고딕코딩"/>
-                <a:cs typeface="나눔고딕코딩"/>
-              </a:rPr>
-              <a:t>Content</a:t>
-            </a:r>
-            <a:r>
-              <a:rPr sz="2025" b="0">
-                <a:solidFill>
-                  <a:srgbClr val="E6EAF2"/>
-                </a:solidFill>
-                <a:latin typeface="나눔고딕코딩"/>
-                <a:ea typeface="나눔고딕코딩"/>
-                <a:cs typeface="나눔고딕코딩"/>
-              </a:rPr>
-              <a:t>-</a:t>
-            </a:r>
-            <a:r>
-              <a:rPr sz="2025" b="0">
-                <a:solidFill>
-                  <a:srgbClr val="E6EAF2"/>
-                </a:solidFill>
-                <a:latin typeface="나눔고딕코딩"/>
-                <a:ea typeface="나눔고딕코딩"/>
-                <a:cs typeface="나눔고딕코딩"/>
-              </a:rPr>
-              <a:t>Type</a:t>
-            </a:r>
-            <a:r>
-              <a:rPr sz="2025" b="0">
-                <a:solidFill>
-                  <a:srgbClr val="E6EAF2"/>
-                </a:solidFill>
-                <a:latin typeface="나눔고딕코딩"/>
-                <a:ea typeface="나눔고딕코딩"/>
-                <a:cs typeface="나눔고딕코딩"/>
-              </a:rPr>
-              <a:t>: </a:t>
-            </a:r>
-            <a:r>
-              <a:rPr sz="2025" b="0">
-                <a:solidFill>
-                  <a:srgbClr val="E6EAF2"/>
-                </a:solidFill>
-                <a:latin typeface="나눔고딕코딩"/>
-                <a:ea typeface="나눔고딕코딩"/>
-                <a:cs typeface="나눔고딕코딩"/>
-              </a:rPr>
-              <a:t>application</a:t>
-            </a:r>
-            <a:r>
-              <a:rPr sz="2025" b="0">
-                <a:solidFill>
-                  <a:srgbClr val="E6EAF2"/>
-                </a:solidFill>
-                <a:latin typeface="나눔고딕코딩"/>
-                <a:ea typeface="나눔고딕코딩"/>
-                <a:cs typeface="나눔고딕코딩"/>
-              </a:rPr>
-              <a:t>/</a:t>
-            </a:r>
-            <a:r>
-              <a:rPr sz="2025" b="0">
-                <a:solidFill>
-                  <a:srgbClr val="E6EAF2"/>
-                </a:solidFill>
-                <a:latin typeface="나눔고딕코딩"/>
-                <a:ea typeface="나눔고딕코딩"/>
-                <a:cs typeface="나눔고딕코딩"/>
-              </a:rPr>
-              <a:t>json</a:t>
-            </a:r>
-            <a:r>
-              <a:rPr sz="2025" b="0">
-                <a:solidFill>
-                  <a:srgbClr val="E6EAF2"/>
-                </a:solidFill>
-                <a:latin typeface="나눔고딕코딩"/>
-                <a:ea typeface="나눔고딕코딩"/>
-                <a:cs typeface="나눔고딕코딩"/>
-              </a:rPr>
-              <a:t>       헤더</a:t>
-            </a:r>
-          </a:p>
-          <a:p>
-            <a:pPr algn="l">
-              <a:lnSpc>
-                <a:spcPct val="115000"/>
-              </a:lnSpc>
-            </a:pPr>
-            <a:r>
-              <a:rPr sz="2025" b="0">
-                <a:solidFill>
-                  <a:srgbClr val="E6EAF2"/>
-                </a:solidFill>
-                <a:latin typeface="나눔고딕코딩"/>
-                <a:ea typeface="나눔고딕코딩"/>
-                <a:cs typeface="나눔고딕코딩"/>
-              </a:rPr>
-              <a:t>Cache</a:t>
-            </a:r>
-            <a:r>
-              <a:rPr sz="2025" b="0">
-                <a:solidFill>
-                  <a:srgbClr val="E6EAF2"/>
-                </a:solidFill>
-                <a:latin typeface="나눔고딕코딩"/>
-                <a:ea typeface="나눔고딕코딩"/>
-                <a:cs typeface="나눔고딕코딩"/>
-              </a:rPr>
-              <a:t>-</a:t>
-            </a:r>
-            <a:r>
-              <a:rPr sz="2025" b="0">
-                <a:solidFill>
-                  <a:srgbClr val="E6EAF2"/>
-                </a:solidFill>
-                <a:latin typeface="나눔고딕코딩"/>
-                <a:ea typeface="나눔고딕코딩"/>
-                <a:cs typeface="나눔고딕코딩"/>
-              </a:rPr>
-              <a:t>Control</a:t>
-            </a:r>
-            <a:r>
-              <a:rPr sz="2025" b="0">
-                <a:solidFill>
-                  <a:srgbClr val="E6EAF2"/>
-                </a:solidFill>
-                <a:latin typeface="나눔고딕코딩"/>
-                <a:ea typeface="나눔고딕코딩"/>
-                <a:cs typeface="나눔고딕코딩"/>
-              </a:rPr>
-              <a:t>: </a:t>
-            </a:r>
-            <a:r>
-              <a:rPr sz="2025" b="0">
-                <a:solidFill>
-                  <a:srgbClr val="E6EAF2"/>
-                </a:solidFill>
-                <a:latin typeface="나눔고딕코딩"/>
-                <a:ea typeface="나눔고딕코딩"/>
-                <a:cs typeface="나눔고딕코딩"/>
-              </a:rPr>
-              <a:t>max</a:t>
-            </a:r>
-            <a:r>
-              <a:rPr sz="2025" b="0">
-                <a:solidFill>
-                  <a:srgbClr val="E6EAF2"/>
-                </a:solidFill>
-                <a:latin typeface="나눔고딕코딩"/>
-                <a:ea typeface="나눔고딕코딩"/>
-                <a:cs typeface="나눔고딕코딩"/>
-              </a:rPr>
-              <a:t>-</a:t>
-            </a:r>
-            <a:r>
-              <a:rPr sz="2025" b="0">
-                <a:solidFill>
-                  <a:srgbClr val="E6EAF2"/>
-                </a:solidFill>
-                <a:latin typeface="나눔고딕코딩"/>
-                <a:ea typeface="나눔고딕코딩"/>
-                <a:cs typeface="나눔고딕코딩"/>
-              </a:rPr>
-              <a:t>age</a:t>
-            </a:r>
-            <a:r>
-              <a:rPr sz="2025" b="0">
-                <a:solidFill>
-                  <a:srgbClr val="E6EAF2"/>
-                </a:solidFill>
-                <a:latin typeface="나눔고딕코딩"/>
-                <a:ea typeface="나눔고딕코딩"/>
-                <a:cs typeface="나눔고딕코딩"/>
-              </a:rPr>
-              <a:t>=</a:t>
-            </a:r>
-            <a:r>
-              <a:rPr sz="2025" b="0">
-                <a:solidFill>
-                  <a:srgbClr val="FFB08A"/>
-                </a:solidFill>
-                <a:latin typeface="나눔고딕코딩"/>
-                <a:ea typeface="나눔고딕코딩"/>
-                <a:cs typeface="나눔고딕코딩"/>
-              </a:rPr>
-              <a:t>3600</a:t>
-            </a:r>
-          </a:p>
-          <a:p>
-            <a:pPr algn="l">
-              <a:lnSpc>
-                <a:spcPct val="115000"/>
-              </a:lnSpc>
-            </a:pPr>
-            <a:r>
-              <a:rPr sz="2025" b="0">
-                <a:solidFill>
-                  <a:srgbClr val="E6EAF2"/>
-                </a:solidFill>
-                <a:latin typeface="나눔고딕코딩"/>
-                <a:ea typeface="나눔고딕코딩"/>
-                <a:cs typeface="나눔고딕코딩"/>
-              </a:rPr>
-              <a:t/>
-            </a:r>
-          </a:p>
-          <a:p>
-            <a:pPr algn="l">
-              <a:lnSpc>
-                <a:spcPct val="115000"/>
-              </a:lnSpc>
-            </a:pPr>
-            <a:r>
-              <a:rPr sz="2025" b="0">
-                <a:solidFill>
-                  <a:srgbClr val="E6EAF2"/>
-                </a:solidFill>
-                <a:latin typeface="나눔고딕코딩"/>
-                <a:ea typeface="나눔고딕코딩"/>
-                <a:cs typeface="나눔고딕코딩"/>
-              </a:rPr>
-              <a:t>{ </a:t>
-            </a:r>
-            <a:r>
-              <a:rPr sz="2025" b="0">
-                <a:solidFill>
-                  <a:srgbClr val="F5C97A"/>
-                </a:solidFill>
-                <a:latin typeface="나눔고딕코딩"/>
-                <a:ea typeface="나눔고딕코딩"/>
-                <a:cs typeface="나눔고딕코딩"/>
-              </a:rPr>
-              <a:t>"id"</a:t>
-            </a:r>
-            <a:r>
-              <a:rPr sz="2025" b="0">
-                <a:solidFill>
-                  <a:srgbClr val="E6EAF2"/>
-                </a:solidFill>
-                <a:latin typeface="나눔고딕코딩"/>
-                <a:ea typeface="나눔고딕코딩"/>
-                <a:cs typeface="나눔고딕코딩"/>
-              </a:rPr>
-              <a:t>: </a:t>
-            </a:r>
-            <a:r>
-              <a:rPr sz="2025" b="0">
-                <a:solidFill>
-                  <a:srgbClr val="FFB08A"/>
-                </a:solidFill>
-                <a:latin typeface="나눔고딕코딩"/>
-                <a:ea typeface="나눔고딕코딩"/>
-                <a:cs typeface="나눔고딕코딩"/>
-              </a:rPr>
-              <a:t>3</a:t>
-            </a:r>
-            <a:r>
-              <a:rPr sz="2025" b="0">
-                <a:solidFill>
-                  <a:srgbClr val="E6EAF2"/>
-                </a:solidFill>
-                <a:latin typeface="나눔고딕코딩"/>
-                <a:ea typeface="나눔고딕코딩"/>
-                <a:cs typeface="나눔고딕코딩"/>
-              </a:rPr>
-              <a:t>, </a:t>
-            </a:r>
-            <a:r>
-              <a:rPr sz="2025" b="0">
-                <a:solidFill>
-                  <a:srgbClr val="F5C97A"/>
-                </a:solidFill>
-                <a:latin typeface="나눔고딕코딩"/>
-                <a:ea typeface="나눔고딕코딩"/>
-                <a:cs typeface="나눔고딕코딩"/>
-              </a:rPr>
-              <a:t>"name"</a:t>
-            </a:r>
-            <a:r>
-              <a:rPr sz="2025" b="0">
-                <a:solidFill>
-                  <a:srgbClr val="E6EAF2"/>
-                </a:solidFill>
-                <a:latin typeface="나눔고딕코딩"/>
-                <a:ea typeface="나눔고딕코딩"/>
-                <a:cs typeface="나눔고딕코딩"/>
-              </a:rPr>
-              <a:t>: </a:t>
-            </a:r>
-            <a:r>
-              <a:rPr sz="2025" b="0">
-                <a:solidFill>
-                  <a:srgbClr val="F5C97A"/>
-                </a:solidFill>
-                <a:latin typeface="나눔고딕코딩"/>
-                <a:ea typeface="나눔고딕코딩"/>
-                <a:cs typeface="나눔고딕코딩"/>
-              </a:rPr>
-              <a:t>"김한신"</a:t>
-            </a:r>
-            <a:r>
-              <a:rPr sz="2025" b="0">
-                <a:solidFill>
-                  <a:srgbClr val="E6EAF2"/>
-                </a:solidFill>
-                <a:latin typeface="나눔고딕코딩"/>
-                <a:ea typeface="나눔고딕코딩"/>
-                <a:cs typeface="나눔고딕코딩"/>
-              </a:rPr>
-              <a:t> }         본문</a:t>
-            </a:r>
-          </a:p>
-        </p:txBody>
-      </p:sp>
+            <a:ext cx="7596188" cy="4976812"/>
+          </a:xfrm>
+          <a:prstGeom prst="rect">
+            <a:avLst/>
+          </a:prstGeom>
+        </p:spPr>
+      </p:pic>
       <p:sp>
         <p:nvSpPr>
           <p:cNvPr id="12" name="Rectangle 11"/>
@@ -39957,315 +39079,30 @@
           </a:p>
         </p:txBody>
       </p:sp>
-      <p:sp>
-        <p:nvSpPr>
-          <p:cNvPr id="11" name="deckgen:code"/>
-          <p:cNvSpPr txBox="1"/>
-          <p:nvPr/>
-        </p:nvSpPr>
+      <p:pic>
+        <p:nvPicPr>
+          <p:cNvPr id="11" name="deckgen:code-art" descr="image.png"/>
+          <p:cNvPicPr>
+            <a:picLocks noChangeAspect="1"/>
+          </p:cNvPicPr>
+          <p:nvPr/>
+        </p:nvPicPr>
+        <p:blipFill>
+          <a:blip r:embed="rId2"/>
+          <a:stretch>
+            <a:fillRect/>
+          </a:stretch>
+        </p:blipFill>
         <p:spPr>
           <a:xfrm>
             <a:off x="2038350" y="2552700"/>
-            <a:ext cx="14897100" cy="5105400"/>
-          </a:xfrm>
-          <a:prstGeom prst="rect">
-            <a:avLst/>
-          </a:prstGeom>
-          <a:noFill/>
-        </p:spPr>
-        <p:txBody>
-          <a:bodyPr wrap="none" lIns="0" rIns="0" tIns="0" bIns="0" anchor="t">
-            <a:spAutoFit/>
-          </a:bodyPr>
-          <a:lstStyle/>
-          <a:p>
-            <a:pPr algn="l">
-              <a:lnSpc>
-                <a:spcPct val="115000"/>
-              </a:lnSpc>
-            </a:pPr>
-            <a:r>
-              <a:rPr sz="2250" b="0">
-                <a:solidFill>
-                  <a:srgbClr val="E6EAF2"/>
-                </a:solidFill>
-                <a:latin typeface="나눔고딕코딩"/>
-                <a:ea typeface="나눔고딕코딩"/>
-                <a:cs typeface="나눔고딕코딩"/>
-              </a:rPr>
-              <a:t>┌─────────────┐</a:t>
-            </a:r>
-          </a:p>
-          <a:p>
-            <a:pPr algn="l">
-              <a:lnSpc>
-                <a:spcPct val="115000"/>
-              </a:lnSpc>
-            </a:pPr>
-            <a:r>
-              <a:rPr sz="2250" b="0">
-                <a:solidFill>
-                  <a:srgbClr val="E6EAF2"/>
-                </a:solidFill>
-                <a:latin typeface="나눔고딕코딩"/>
-                <a:ea typeface="나눔고딕코딩"/>
-                <a:cs typeface="나눔고딕코딩"/>
-              </a:rPr>
-              <a:t>│  콜 스택     │  지금 실행 중인 것. 여기가 비어야 다음이 들어온다</a:t>
-            </a:r>
-          </a:p>
-          <a:p>
-            <a:pPr algn="l">
-              <a:lnSpc>
-                <a:spcPct val="115000"/>
-              </a:lnSpc>
-            </a:pPr>
-            <a:r>
-              <a:rPr sz="2250" b="0">
-                <a:solidFill>
-                  <a:srgbClr val="E6EAF2"/>
-                </a:solidFill>
-                <a:latin typeface="나눔고딕코딩"/>
-                <a:ea typeface="나눔고딕코딩"/>
-                <a:cs typeface="나눔고딕코딩"/>
-              </a:rPr>
-              <a:t>└─────────────┘</a:t>
-            </a:r>
-          </a:p>
-          <a:p>
-            <a:pPr algn="l">
-              <a:lnSpc>
-                <a:spcPct val="115000"/>
-              </a:lnSpc>
-            </a:pPr>
-            <a:r>
-              <a:rPr sz="2250" b="0">
-                <a:solidFill>
-                  <a:srgbClr val="E6EAF2"/>
-                </a:solidFill>
-                <a:latin typeface="나눔고딕코딩"/>
-                <a:ea typeface="나눔고딕코딩"/>
-                <a:cs typeface="나눔고딕코딩"/>
-              </a:rPr>
-              <a:t>       ↑</a:t>
-            </a:r>
-          </a:p>
-          <a:p>
-            <a:pPr algn="l">
-              <a:lnSpc>
-                <a:spcPct val="115000"/>
-              </a:lnSpc>
-            </a:pPr>
-            <a:r>
-              <a:rPr sz="2250" b="0">
-                <a:solidFill>
-                  <a:srgbClr val="E6EAF2"/>
-                </a:solidFill>
-                <a:latin typeface="나눔고딕코딩"/>
-                <a:ea typeface="나눔고딕코딩"/>
-                <a:cs typeface="나눔고딕코딩"/>
-              </a:rPr>
-              <a:t>       │  콜 스택이 비면 하나씩 꺼내 올린다 (= 이벤트 루프)</a:t>
-            </a:r>
-          </a:p>
-          <a:p>
-            <a:pPr algn="l">
-              <a:lnSpc>
-                <a:spcPct val="115000"/>
-              </a:lnSpc>
-            </a:pPr>
-            <a:r>
-              <a:rPr sz="2250" b="0">
-                <a:solidFill>
-                  <a:srgbClr val="E6EAF2"/>
-                </a:solidFill>
-                <a:latin typeface="나눔고딕코딩"/>
-                <a:ea typeface="나눔고딕코딩"/>
-                <a:cs typeface="나눔고딕코딩"/>
-              </a:rPr>
-              <a:t>       │</a:t>
-            </a:r>
-          </a:p>
-          <a:p>
-            <a:pPr algn="l">
-              <a:lnSpc>
-                <a:spcPct val="115000"/>
-              </a:lnSpc>
-            </a:pPr>
-            <a:r>
-              <a:rPr sz="2250" b="0">
-                <a:solidFill>
-                  <a:srgbClr val="E6EAF2"/>
-                </a:solidFill>
-                <a:latin typeface="나눔고딕코딩"/>
-                <a:ea typeface="나눔고딕코딩"/>
-                <a:cs typeface="나눔고딕코딩"/>
-              </a:rPr>
-              <a:t>┌─────────────┐   ┌─────────────────┐</a:t>
-            </a:r>
-          </a:p>
-          <a:p>
-            <a:pPr algn="l">
-              <a:lnSpc>
-                <a:spcPct val="115000"/>
-              </a:lnSpc>
-            </a:pPr>
-            <a:r>
-              <a:rPr sz="2250" b="0">
-                <a:solidFill>
-                  <a:srgbClr val="E6EAF2"/>
-                </a:solidFill>
-                <a:latin typeface="나눔고딕코딩"/>
-                <a:ea typeface="나눔고딕코딩"/>
-                <a:cs typeface="나눔고딕코딩"/>
-              </a:rPr>
-              <a:t>│  태스크 큐   │   │ 마이크로태스크 큐  │  ← </a:t>
-            </a:r>
-            <a:r>
-              <a:rPr sz="2250" b="0">
-                <a:solidFill>
-                  <a:srgbClr val="E6EAF2"/>
-                </a:solidFill>
-                <a:latin typeface="나눔고딕코딩"/>
-                <a:ea typeface="나눔고딕코딩"/>
-                <a:cs typeface="나눔고딕코딩"/>
-              </a:rPr>
-              <a:t>Promise</a:t>
-            </a:r>
-            <a:r>
-              <a:rPr sz="2250" b="0">
-                <a:solidFill>
-                  <a:srgbClr val="E6EAF2"/>
-                </a:solidFill>
-                <a:latin typeface="나눔고딕코딩"/>
-                <a:ea typeface="나눔고딕코딩"/>
-                <a:cs typeface="나눔고딕코딩"/>
-              </a:rPr>
-              <a:t>. 이쪽을 먼저 비운다</a:t>
-            </a:r>
-          </a:p>
-          <a:p>
-            <a:pPr algn="l">
-              <a:lnSpc>
-                <a:spcPct val="115000"/>
-              </a:lnSpc>
-            </a:pPr>
-            <a:r>
-              <a:rPr sz="2250" b="0">
-                <a:solidFill>
-                  <a:srgbClr val="E6EAF2"/>
-                </a:solidFill>
-                <a:latin typeface="나눔고딕코딩"/>
-                <a:ea typeface="나눔고딕코딩"/>
-                <a:cs typeface="나눔고딕코딩"/>
-              </a:rPr>
-              <a:t>│ </a:t>
-            </a:r>
-            <a:r>
-              <a:rPr sz="2250" b="0">
-                <a:solidFill>
-                  <a:srgbClr val="E6EAF2"/>
-                </a:solidFill>
-                <a:latin typeface="나눔고딕코딩"/>
-                <a:ea typeface="나눔고딕코딩"/>
-                <a:cs typeface="나눔고딕코딩"/>
-              </a:rPr>
-              <a:t>setTimeout</a:t>
-            </a:r>
-            <a:r>
-              <a:rPr sz="2250" b="0">
-                <a:solidFill>
-                  <a:srgbClr val="E6EAF2"/>
-                </a:solidFill>
-                <a:latin typeface="나눔고딕코딩"/>
-                <a:ea typeface="나눔고딕코딩"/>
-                <a:cs typeface="나눔고딕코딩"/>
-              </a:rPr>
-              <a:t>  │   │  .</a:t>
-            </a:r>
-            <a:r>
-              <a:rPr sz="2250" b="0">
-                <a:solidFill>
-                  <a:srgbClr val="E6EAF2"/>
-                </a:solidFill>
-                <a:latin typeface="나눔고딕코딩"/>
-                <a:ea typeface="나눔고딕코딩"/>
-                <a:cs typeface="나눔고딕코딩"/>
-              </a:rPr>
-              <a:t>then</a:t>
-            </a:r>
-            <a:r>
-              <a:rPr sz="2250" b="0">
-                <a:solidFill>
-                  <a:srgbClr val="E6EAF2"/>
-                </a:solidFill>
-                <a:latin typeface="나눔고딕코딩"/>
-                <a:ea typeface="나눔고딕코딩"/>
-                <a:cs typeface="나눔고딕코딩"/>
-              </a:rPr>
-              <a:t> / </a:t>
-            </a:r>
-            <a:r>
-              <a:rPr sz="2250" b="0">
-                <a:solidFill>
-                  <a:srgbClr val="D9A7FF"/>
-                </a:solidFill>
-                <a:latin typeface="나눔고딕코딩"/>
-                <a:ea typeface="나눔고딕코딩"/>
-                <a:cs typeface="나눔고딕코딩"/>
-              </a:rPr>
-              <a:t>await</a:t>
-            </a:r>
-            <a:r>
-              <a:rPr sz="2250" b="0">
-                <a:solidFill>
-                  <a:srgbClr val="E6EAF2"/>
-                </a:solidFill>
-                <a:latin typeface="나눔고딕코딩"/>
-                <a:ea typeface="나눔고딕코딩"/>
-                <a:cs typeface="나눔고딕코딩"/>
-              </a:rPr>
-              <a:t>   │</a:t>
-            </a:r>
-          </a:p>
-          <a:p>
-            <a:pPr algn="l">
-              <a:lnSpc>
-                <a:spcPct val="115000"/>
-              </a:lnSpc>
-            </a:pPr>
-            <a:r>
-              <a:rPr sz="2250" b="0">
-                <a:solidFill>
-                  <a:srgbClr val="E6EAF2"/>
-                </a:solidFill>
-                <a:latin typeface="나눔고딕코딩"/>
-                <a:ea typeface="나눔고딕코딩"/>
-                <a:cs typeface="나눔고딕코딩"/>
-              </a:rPr>
-              <a:t>│ 이벤트 핸들러 │   └─────────────────┘</a:t>
-            </a:r>
-          </a:p>
-          <a:p>
-            <a:pPr algn="l">
-              <a:lnSpc>
-                <a:spcPct val="115000"/>
-              </a:lnSpc>
-            </a:pPr>
-            <a:r>
-              <a:rPr sz="2250" b="0">
-                <a:solidFill>
-                  <a:srgbClr val="E6EAF2"/>
-                </a:solidFill>
-                <a:latin typeface="나눔고딕코딩"/>
-                <a:ea typeface="나눔고딕코딩"/>
-                <a:cs typeface="나눔고딕코딩"/>
-              </a:rPr>
-              <a:t>└─────────────┘</a:t>
-            </a:r>
-          </a:p>
-        </p:txBody>
-      </p:sp>
+            <a:ext cx="8867775" cy="4348162"/>
+          </a:xfrm>
+          <a:prstGeom prst="rect">
+            <a:avLst/>
+          </a:prstGeom>
+        </p:spPr>
+      </p:pic>
       <p:sp>
         <p:nvSpPr>
           <p:cNvPr id="12" name="Rectangle 11"/>
